--- a/docs/presentations/v3/10-kinematics.pptx
+++ b/docs/presentations/v3/10-kinematics.pptx
@@ -513,7 +513,7 @@
           <a:p>
             <a:r>
               <a:rPr lang="en-US" dirty="0"/>
-              <a:t/>
+              <a:t>Lesson 7's translate handles "drive in a direction." Lesson 8's rotate handles "spin in place." What neither one does is both at once — this lesson replaces both with SwerveDriveKinematics so the chassis can translate and rotate at the same time, the "full swerve" behavior every real swerve robot needs.</a:t>
             </a:r>
             <a:endParaRPr lang="en-US" dirty="0"/>
           </a:p>
@@ -601,7 +601,7 @@
           <a:p>
             <a:r>
               <a:rPr lang="en-US" dirty="0"/>
-              <a:t/>
+              <a:t>Right now the sticks are robot-relative: pushing forward always drives the robot in its own forward direction, wherever it happens to be pointing — which means after a 180° turn, forward is backward and half the drivers' brains melt. Most drivers prefer field-relative: pushing forward always drives away from the driver's station, regardless of robot orientation. Thanks to applyChassisSpeeds, this is now a genuinely small method — one new line of math and a delegation. fieldSpeeds.toRobotRelative(...) rotates the field-frame velocity into the robot's frame using the current heading — the gyro from Lesson 8 quietly becoming load-bearing. toRobotRelative reads the same way optimize and cosineScale do: it doesn't change fieldSpeeds, it returns the converted value. Everything downstream still speaks robot frame, and applyChassisSpeeds neither knows nor cares where the speeds came from — that's the extraction paying rent already. Once you feel field-relative driving, you won't want to give it up — that's worth saying plainly, it's the version drivers actually want.</a:t>
             </a:r>
             <a:endParaRPr lang="en-US" dirty="0"/>
           </a:p>
@@ -689,7 +689,7 @@
           <a:p>
             <a:r>
               <a:rPr lang="en-US" dirty="0"/>
-              <a:t/>
+              <a:t>The watch-a-wheel-optimize exercise is the one worth actually running: drive slow forward, then abruptly reverse, and watch DesiredModuleStates's arrows flip length-direction instead of swinging 180° — that's optimize doing its job visibly, not just in theory. The spin-while-driving auto is a good concrete demonstration that this really is full swerve now — forward motion and rotation composed in one command, which was impossible before this lesson. The slow-mode multiplier is a light reprise of composing a new command around drive(...), similar in spirit to Lesson 2's slow-mode Try It but now scaling three suppliers instead of one.</a:t>
             </a:r>
             <a:endParaRPr lang="en-US" dirty="0"/>
           </a:p>
@@ -777,7 +777,7 @@
           <a:p>
             <a:r>
               <a:rPr lang="en-US" dirty="0"/>
-              <a:t/>
+              <a:t>Full swerve turned out to be a translation exercise: ChassisVelocities says what you want the whole robot to do, SwerveDriveKinematics translates that into per-wheel SwerveModuleVelocitys, and the two hand-rolled commands from Lessons 7–8 collapsed into one drive that mixes translation and rotation freely. One library tool also graduated: MathUtil.inputModulus retired the wrap loop, the same trade the hand-rolled clamp didn't get to make, because this alpha never shipped one to graduate to. The quieter thread running through the whole lesson: optimize, cosineScale, and toRobotRelative all share a shape — call them, get a new value back, original untouched — the same immutable style Rotation2d and Translation2d have had all along, now showing up in the kinematics types too. Field-relative is the version drivers will never let you take away. One thing is still missing: the robot can move any way you ask, but it has no idea where it is. A future lesson gives it a map.</a:t>
             </a:r>
             <a:endParaRPr lang="en-US" dirty="0"/>
           </a:p>
@@ -865,7 +865,7 @@
           <a:p>
             <a:r>
               <a:rPr lang="en-US" dirty="0"/>
-              <a:t/>
+              <a:t>Give SwerveDriveKinematics a ChassisVelocities; it hands back four SwerveModuleVelocitys — the same type you've been logging to the Swerve tab since Lesson 7. Today that type stops being just telemetry and becomes the language the whole drivetrain speaks.</a:t>
             </a:r>
             <a:endParaRPr lang="en-US" dirty="0"/>
           </a:p>
@@ -953,7 +953,7 @@
           <a:p>
             <a:r>
               <a:rPr lang="en-US" dirty="0"/>
-              <a:t/>
+              <a:t>Each calls setDesiredState on every module, and since translate and rotate both require the Drivetrain, scheduling one cancels the other — that's the actual mechanical reason neither can run alongside the other, not just a design choice. The math is simple once spelled out: at each corner, add the translation velocity vector to the rotation velocity vector (which points tangent to the circle around the center, with magnitude ω × r). WPILib packages it as SwerveDriveKinematics so you never have to re-derive it.</a:t>
             </a:r>
             <a:endParaRPr lang="en-US" dirty="0"/>
           </a:p>
@@ -1041,7 +1041,7 @@
           <a:p>
             <a:r>
               <a:rPr lang="en-US" dirty="0"/>
-              <a:t/>
+              <a:t>The order the corners are listed in matters — whatever order you list them here is the order toSwerveModuleVelocities returns states in. Match the array built in Lesson 7 (FL, FR, BL, BR) exactly; a swapped pair produces a robot that almost drives right, which is the most confusing kind of wrong. What's new today is that WPILib's own kinematics types speak Units too: ChassisVelocities, SwerveModuleVelocity, and SwerveDriveKinematics all take measures directly, so a LinearVelocity flows straight through them — you don't unpack it to a double until you hit something that genuinely only speaks numbers, like Phoenix's setThrottle. MetersPerSecond.of(...) builds a LinearVelocity from a plain number — the arithmetic stays in doubles (readable), and the result becomes unit-aware. That's the pattern for making one: compute in doubles, wrap the answer. Worth naming: this is close to the "5" eyeballed for the Swerve tab's Max Speed back in Lesson 7 — now it's a computed, typed constant instead of a guess.</a:t>
             </a:r>
             <a:endParaRPr lang="en-US" dirty="0"/>
           </a:p>
@@ -1129,7 +1129,7 @@
           <a:p>
             <a:r>
               <a:rPr lang="en-US" dirty="0"/>
-              <a:t/>
+              <a:t>Your clamp two lines down doesn't get the same MathUtil treatment — this alpha's MathUtil has no clamp to graduate to, so the private helper from Lesson 5 stays, permanently, same as it did in Lesson 7. kMaxSpeed.in(MetersPerSecond) is the Units boundary in action: the constant is a typed LinearVelocity, but the division needs a plain number, so .in(...) hands one back. Worth noting explicitly: state.velocity is read as a plain double, not unpacked with .in(...) — SwerveModuleVelocity's constructor accepts a LinearVelocity if you want to build one that way, but the value it actually stores is a bare double in meters per second. Units at the boundary where you build the value, plain numbers once it's inside a kinematics type built for speed — you'll see the same thing on ChassisVelocities in a moment. Also worth a callout: this alpha ships SwerveModuleVelocity.cosineScale(Rotation2d) doing exactly the alignment trick here, built in — it's not used because the hand-rolled version already lives right next to the P control it depends on, and moving it wouldn't simplify anything. And remember to update Drivetrain.driveDistance from Lesson 9 — it called the old two-argument setDesiredState(0.0, 0.4), which no longer compiles; build a state instead with kMaxSpeed.times(0.4) and Rotation2d.fromDegrees(0).</a:t>
             </a:r>
             <a:endParaRPr lang="en-US" dirty="0"/>
           </a:p>
@@ -1217,7 +1217,7 @@
           <a:p>
             <a:r>
               <a:rPr lang="en-US" dirty="0"/>
-              <a:t/>
+              <a:t>This is Lesson 8's own trick again: every path into the drivetrain — stick driving, heading turns, and a future lesson's pose chasing — ends with the same four steps, so those four steps become one private helper and everything else becomes a thin caller. new ChassisVelocities(vx, vy, ω) packs "what I want the whole robot to do" into a single value; toSwerveModuleVelocities is the library math this lesson exists for, one chassis motion in, one SwerveModuleVelocity[] out, one entry per corner in the order given to the constructor. desaturateWheelVelocities matters at the edge of the envelope: if translation-plus-rotation asks one wheel for 6 m/s but the max is 4.7, it scales all four down so the motion keeps its shape, just slower — without it, the overasked wheel silently caps and the robot curves off course. Now the real trap: optimize doesn't change states[i] in place — it's a pure function, same as Rotation2d.rotateBy or Translation2d.plus — it returns a new SwerveModuleVelocity, and the original is untouched. Call states[i].optimize(...) and throw away the result, and nothing happens — the module gets commanded with the un-optimized state, silently. That's why the loop reads states[i] = states[i].optimize(...) — assign it back before it's used. The indexed for loop is the new shape here because states[i] has to be paired with m_modules[i], and pairing two arrays takes an index. m_lastCommandedOmega keeps Lesson 8's fake gyro fed, and m_desiredModuleStatesPublisher.set(states) publishes the desired states right next to Lesson 7's measured ones — section 6 shows why that pair is gold.</a:t>
             </a:r>
             <a:endParaRPr lang="en-US" dirty="0"/>
           </a:p>
@@ -1305,7 +1305,7 @@
           <a:p>
             <a:r>
               <a:rPr lang="en-US" dirty="0"/>
-              <a:t/>
+              <a:t>Delete the translate and rotate command factories from Drivetrain — kinematics subsumes both. But don't delete commandRotation: Lesson 8's turnToHeading still calls it, and breaking a working command isn't part of the plan. Instead the machinery underneath it gets rebuilt: its one-line translator means turnToHeading keeps working without a single edit. runRepeatedly is the same helper driveWithJoystick used back in Lesson 2 — a plain block of code, run once per tick until something cancels the command. While in the file, headingError gets the same one-liner treatment the module just got, via MathUtil.inputModulus — its two while loops were the last hand-rolled wrap left in the codebase.</a:t>
             </a:r>
             <a:endParaRPr lang="en-US" dirty="0"/>
           </a:p>
@@ -1393,7 +1393,7 @@
           <a:p>
             <a:r>
               <a:rPr lang="en-US" dirty="0"/>
-              <a:t/>
+              <a:t>Without optimize, wheels routinely make 180° pirouettes for no reason, which looks awful and burns time. With it, they nudge a few degrees and reverse — as swerve robots should. Note what it needs to decide: the wheel's current angle — that's why the measurement gets passed in. Worth naming the connection to Lesson 9's cosine trick: optimize keeps every steering move under 90°, which means the cosine scale in setDesiredState never goes negative — the two together give wheels that take the short path AND hold their push until they're pointed right.</a:t>
             </a:r>
             <a:endParaRPr lang="en-US" dirty="0"/>
           </a:p>
@@ -1481,7 +1481,7 @@
           <a:p>
             <a:r>
               <a:rPr lang="en-US" dirty="0"/>
-              <a:t/>
+              <a:t>Two edits: delete the Lesson 7 default translate binding and both bumper rotate bindings — those factories no longer exist, and the right stick is taking over rotation. The turnToHeading bindings from Lesson 8 stay; they never stopped working. Look at each supplier: the stick reads a fraction from -1 to 1, and kMaxSpeed.times(fraction) scales the max-speed measure down to that fraction — the result is still a LinearVelocity, exactly what drive now asks for. No maxMps local, no .in(...) — the unit rides all the way from the constant into ChassisVelocities. This is the Units payoff: because every hop speaks the type, there's simply no boundary to convert at until Phoenix's setThrottle, deep inside setDesiredState. Once wired, open the Swerve tab and push both sticks: with ModuleStates and DesiredModuleStates both dropped into the States slots, you see two sets of arrows — where the wheels are told to be, and where they actually are. When the two sets track each other closely, steering control is keeping up; when they lag apart, that's exactly what to tune.</a:t>
             </a:r>
             <a:endParaRPr lang="en-US" dirty="0"/>
           </a:p>
